--- a/dist/초3/수학/도형과측정/초3_수학_도형과측정_05_초와시간의계산.pptx
+++ b/dist/초3/수학/도형과측정/초3_수학_도형과측정_05_초와시간의계산.pptx
@@ -122,13 +122,13 @@
   <p:extLst>
     <p:ext uri="{521415D9-36F7-43E2-AB2F-B90AF26B5E84}">
       <p14:sectionLst xmlns:p14="http://schemas.microsoft.com/office/powerpoint/2010/main">
-        <p14:section name="도입" id="{edf48feb-638a-1a7f-a995-2e774a20fc01}">
+        <p14:section name="도입" id="{04ca764d-b5a3-3e22-1999-99ebfa9eaf6c}">
           <p14:sldIdLst>
             <p14:sldId id="256"/>
             <p14:sldId id="257"/>
           </p14:sldIdLst>
         </p14:section>
-        <p14:section name="개념" id="{096c6f21-b79f-e90b-be3b-62e161442279}">
+        <p14:section name="개념" id="{2cfcb91e-5d0c-6c88-93d1-2f1702013982}">
           <p14:sldIdLst>
             <p14:sldId id="258"/>
             <p14:sldId id="259"/>
@@ -138,32 +138,32 @@
             <p14:sldId id="265"/>
           </p14:sldIdLst>
         </p14:section>
-        <p14:section name="연습" id="{14f7de91-6c8f-cea3-87c4-bde7e251e96e}">
+        <p14:section name="연습" id="{b5189bcf-775a-13d7-08e4-fecb0a0085d7}">
           <p14:sldIdLst>
             <p14:sldId id="261"/>
             <p14:sldId id="262"/>
             <p14:sldId id="266"/>
           </p14:sldIdLst>
         </p14:section>
-        <p14:section name="개념" id="{76b079fa-c27a-cef5-a98b-f7f7b431d839}">
+        <p14:section name="개념" id="{c8494d70-2930-648f-87a0-d518a59e8cef}">
           <p14:sldIdLst/>
         </p14:section>
-        <p14:section name="연습" id="{3b9df6c7-86b0-0597-abce-0e1546ae8e1f}">
+        <p14:section name="연습" id="{55e7d130-51e7-bbd0-5a3d-4e67886f9a43}">
           <p14:sldIdLst/>
         </p14:section>
-        <p14:section name="확인" id="{d97f9bd6-0a8e-a002-8eed-b3b181c3c7be}">
+        <p14:section name="확인" id="{cf8170d8-b15e-44bf-08c2-55ca1c74b133}">
           <p14:sldIdLst>
             <p14:sldId id="267"/>
             <p14:sldId id="268"/>
             <p14:sldId id="269"/>
           </p14:sldIdLst>
         </p14:section>
-        <p14:section name="정리" id="{73537a95-601f-fd26-9c08-f556225adbfc}">
+        <p14:section name="정리" id="{0a9f044e-6c45-5e79-42d5-7ecc3dcf6985}">
           <p14:sldIdLst>
             <p14:sldId id="270"/>
           </p14:sldIdLst>
         </p14:section>
-        <p14:section name="보충" id="{80792ee7-5d90-32b6-a095-97e7b5e69e9d}">
+        <p14:section name="보충" id="{874e9b5d-538a-8eaa-53fc-c5b2bb3533f6}">
           <p14:sldIdLst>
             <p14:sldId id="271"/>
           </p14:sldIdLst>
@@ -3251,7 +3251,7 @@
           </p:nvPr>
         </p:nvGraphicFramePr>
         <p:xfrm>
-          <a:off x="7909560" y="1046480"/>
+          <a:off x="7909560" y="1079500"/>
           <a:ext cx="3474720" cy="914400"/>
         </p:xfrm>
         <a:graphic>
@@ -3264,7 +3264,7 @@
                 <a:gridCol w="868680"/>
                 <a:gridCol w="868680"/>
               </a:tblGrid>
-              <a:tr h="528320">
+              <a:tr h="511810">
                 <a:tc>
                   <a:txBody>
                     <a:bodyPr/>
@@ -3527,7 +3527,7 @@
                   </a:tcPr>
                 </a:tc>
               </a:tr>
-              <a:tr h="528320">
+              <a:tr h="511810">
                 <a:tc>
                   <a:txBody>
                     <a:bodyPr/>
@@ -3779,7 +3779,7 @@
                   </a:tcPr>
                 </a:tc>
               </a:tr>
-              <a:tr h="528320">
+              <a:tr h="511810">
                 <a:tc>
                   <a:txBody>
                     <a:bodyPr/>
@@ -4042,7 +4042,7 @@
                   </a:tcPr>
                 </a:tc>
               </a:tr>
-              <a:tr h="528320">
+              <a:tr h="511810">
                 <a:tc>
                   <a:txBody>
                     <a:bodyPr/>
@@ -4596,7 +4596,7 @@
           </p:nvPr>
         </p:nvGraphicFramePr>
         <p:xfrm>
-          <a:off x="7284750" y="2143760"/>
+          <a:off x="7284750" y="2188210"/>
           <a:ext cx="4206240" cy="914400"/>
         </p:xfrm>
         <a:graphic>
@@ -4609,7 +4609,7 @@
                 <a:gridCol w="1051560"/>
                 <a:gridCol w="1051560"/>
               </a:tblGrid>
-              <a:tr h="568960">
+              <a:tr h="551180">
                 <a:tc>
                   <a:txBody>
                     <a:bodyPr/>
@@ -4872,7 +4872,7 @@
                   </a:tcPr>
                 </a:tc>
               </a:tr>
-              <a:tr h="568960">
+              <a:tr h="551180">
                 <a:tc>
                   <a:txBody>
                     <a:bodyPr/>
@@ -5113,7 +5113,7 @@
                   </a:tcPr>
                 </a:tc>
               </a:tr>
-              <a:tr h="568960">
+              <a:tr h="551180">
                 <a:tc>
                   <a:txBody>
                     <a:bodyPr/>
@@ -5365,7 +5365,7 @@
                   </a:tcPr>
                 </a:tc>
               </a:tr>
-              <a:tr h="568960">
+              <a:tr h="551180">
                 <a:tc>
                   <a:txBody>
                     <a:bodyPr/>
@@ -5628,7 +5628,7 @@
                   </a:tcPr>
                 </a:tc>
               </a:tr>
-              <a:tr h="568960">
+              <a:tr h="551180">
                 <a:tc>
                   <a:txBody>
                     <a:bodyPr/>
@@ -6351,7 +6351,7 @@
           </p:nvPr>
         </p:nvGraphicFramePr>
         <p:xfrm>
-          <a:off x="6855714" y="1660144"/>
+          <a:off x="6855714" y="1701419"/>
           <a:ext cx="4206240" cy="914400"/>
         </p:xfrm>
         <a:graphic>
@@ -6364,7 +6364,7 @@
                 <a:gridCol w="1051560"/>
                 <a:gridCol w="1051560"/>
               </a:tblGrid>
-              <a:tr h="528320">
+              <a:tr h="511810">
                 <a:tc>
                   <a:txBody>
                     <a:bodyPr/>
@@ -6627,7 +6627,7 @@
                   </a:tcPr>
                 </a:tc>
               </a:tr>
-              <a:tr h="528320">
+              <a:tr h="511810">
                 <a:tc>
                   <a:txBody>
                     <a:bodyPr/>
@@ -6868,7 +6868,7 @@
                   </a:tcPr>
                 </a:tc>
               </a:tr>
-              <a:tr h="528320">
+              <a:tr h="511810">
                 <a:tc>
                   <a:txBody>
                     <a:bodyPr/>
@@ -7120,7 +7120,7 @@
                   </a:tcPr>
                 </a:tc>
               </a:tr>
-              <a:tr h="528320">
+              <a:tr h="511810">
                 <a:tc>
                   <a:txBody>
                     <a:bodyPr/>
@@ -7383,7 +7383,7 @@
                   </a:tcPr>
                 </a:tc>
               </a:tr>
-              <a:tr h="528320">
+              <a:tr h="511810">
                 <a:tc>
                   <a:txBody>
                     <a:bodyPr/>
@@ -16699,7 +16699,7 @@
               <a:buNone/>
             </a:pPr>
             <a:r>
-              <a:rPr lang="ko-KR" altLang="en-US" sz="3400" b="1" dirty="0">
+              <a:rPr lang="en-US" altLang="ko-KR" sz="3400" b="1" dirty="0">
                 <a:solidFill>
                   <a:srgbClr val="1F2937"/>
                 </a:solidFill>
@@ -24248,7 +24248,7 @@
           </p:nvPr>
         </p:nvGraphicFramePr>
         <p:xfrm>
-          <a:off x="7284750" y="2143760"/>
+          <a:off x="7284750" y="2188210"/>
           <a:ext cx="4206240" cy="914400"/>
         </p:xfrm>
         <a:graphic>
@@ -24261,7 +24261,7 @@
                 <a:gridCol w="1051560"/>
                 <a:gridCol w="1051560"/>
               </a:tblGrid>
-              <a:tr h="568960">
+              <a:tr h="551180">
                 <a:tc>
                   <a:txBody>
                     <a:bodyPr/>
@@ -24524,7 +24524,7 @@
                   </a:tcPr>
                 </a:tc>
               </a:tr>
-              <a:tr h="568960">
+              <a:tr h="551180">
                 <a:tc>
                   <a:txBody>
                     <a:bodyPr/>
@@ -24765,7 +24765,7 @@
                   </a:tcPr>
                 </a:tc>
               </a:tr>
-              <a:tr h="568960">
+              <a:tr h="551180">
                 <a:tc>
                   <a:txBody>
                     <a:bodyPr/>
@@ -25017,7 +25017,7 @@
                   </a:tcPr>
                 </a:tc>
               </a:tr>
-              <a:tr h="568960">
+              <a:tr h="551180">
                 <a:tc>
                   <a:txBody>
                     <a:bodyPr/>
@@ -25280,7 +25280,7 @@
                   </a:tcPr>
                 </a:tc>
               </a:tr>
-              <a:tr h="568960">
+              <a:tr h="551180">
                 <a:tc>
                   <a:txBody>
                     <a:bodyPr/>
@@ -26042,7 +26042,7 @@
           </p:nvPr>
         </p:nvGraphicFramePr>
         <p:xfrm>
-          <a:off x="7284750" y="2143760"/>
+          <a:off x="7284750" y="2188210"/>
           <a:ext cx="4206240" cy="914400"/>
         </p:xfrm>
         <a:graphic>
@@ -26055,7 +26055,7 @@
                 <a:gridCol w="1051560"/>
                 <a:gridCol w="1051560"/>
               </a:tblGrid>
-              <a:tr h="568960">
+              <a:tr h="551180">
                 <a:tc>
                   <a:txBody>
                     <a:bodyPr/>
@@ -26318,7 +26318,7 @@
                   </a:tcPr>
                 </a:tc>
               </a:tr>
-              <a:tr h="568960">
+              <a:tr h="551180">
                 <a:tc>
                   <a:txBody>
                     <a:bodyPr/>
@@ -26570,7 +26570,7 @@
                   </a:tcPr>
                 </a:tc>
               </a:tr>
-              <a:tr h="568960">
+              <a:tr h="551180">
                 <a:tc>
                   <a:txBody>
                     <a:bodyPr/>
@@ -26822,7 +26822,7 @@
                   </a:tcPr>
                 </a:tc>
               </a:tr>
-              <a:tr h="568960">
+              <a:tr h="551180">
                 <a:tc>
                   <a:txBody>
                     <a:bodyPr/>
@@ -27085,7 +27085,7 @@
                   </a:tcPr>
                 </a:tc>
               </a:tr>
-              <a:tr h="568960">
+              <a:tr h="551180">
                 <a:tc>
                   <a:txBody>
                     <a:bodyPr/>
